--- a/docs/MAYA-System-Design.pptx
+++ b/docs/MAYA-System-Design.pptx
@@ -47219,6 +47219,28 @@
               <a:t>Full document: docs/14-detailed-design.md   ·   Architecture: docs/04-architecture.md   ·   Adversarial review: docs/11-adversarial-review.md</a:t>
             </a:r>
           </a:p>
+          <a:p>
+            <a:pPr>
+              <a:lnSpc>
+                <a:spcPct val="125000"/>
+              </a:lnSpc>
+              <a:spcBef>
+                <a:spcPts val="1000"/>
+              </a:spcBef>
+              <a:spcAft>
+                <a:spcPts val="600"/>
+              </a:spcAft>
+            </a:pPr>
+            <a:r>
+              <a:rPr sz="850" b="0" i="0">
+                <a:solidFill>
+                  <a:srgbClr val="D8A0AC"/>
+                </a:solidFill>
+                <a:latin typeface="Calibri"/>
+              </a:rPr>
+              <a:t>© 2026 Ashutosh Sinha. All rights reserved. Proprietary and confidential — see LICENSE and NOTICE. Not legal, regulatory or financial advice.</a:t>
+            </a:r>
+          </a:p>
         </p:txBody>
       </p:sp>
     </p:spTree>
